--- a/dist/초2/도덕·윤리/공감과협력/초2_도덕·윤리_공감과협력_01_공감과공정한사용_학생용.pptx
+++ b/dist/초2/도덕·윤리/공감과협력/초2_도덕·윤리_공감과협력_01_공감과공정한사용_학생용.pptx
@@ -119,20 +119,20 @@
   <p:extLst>
     <p:ext uri="{521415D9-36F7-43E2-AB2F-B90AF26B5E84}">
       <p14:sectionLst xmlns:p14="http://schemas.microsoft.com/office/powerpoint/2010/main">
-        <p14:section name="도입" id="{7aae0e60-fa6c-efc0-212f-0fab24dc7289}">
+        <p14:section name="도입" id="{5134c9af-c4d6-efb7-6c4a-5c856643034b}">
           <p14:sldIdLst>
             <p14:sldId id="256"/>
             <p14:sldId id="257"/>
           </p14:sldIdLst>
         </p14:section>
-        <p14:section name="개념" id="{e7b416a6-9c6e-52cc-8516-b827eab0858d}">
+        <p14:section name="개념" id="{a96d43d8-239f-125f-0b55-3beee772d946}">
           <p14:sldIdLst>
             <p14:sldId id="258"/>
             <p14:sldId id="259"/>
             <p14:sldId id="261"/>
           </p14:sldIdLst>
         </p14:section>
-        <p14:section name="연습" id="{2239740f-73ba-9506-de62-c71795642912}">
+        <p14:section name="연습" id="{49b6b6f8-6958-3dfc-6175-ef529c1bd33b}">
           <p14:sldIdLst>
             <p14:sldId id="260"/>
             <p14:sldId id="262"/>
@@ -140,24 +140,24 @@
             <p14:sldId id="264"/>
           </p14:sldIdLst>
         </p14:section>
-        <p14:section name="개념" id="{261a766b-f076-2e77-ca9f-0492e14ca49c}">
+        <p14:section name="개념" id="{a4e1fe3b-58bc-3847-3940-f111ae858553}">
           <p14:sldIdLst/>
         </p14:section>
-        <p14:section name="연습" id="{edc4a376-1cb6-133b-bc12-2b82bb907582}">
+        <p14:section name="연습" id="{40a904c1-f29d-bca3-056a-ad8967d586ee}">
           <p14:sldIdLst/>
         </p14:section>
-        <p14:section name="확인" id="{4a98d75c-4527-e285-9f10-5655bbbed82d}">
+        <p14:section name="확인" id="{fe0de344-0861-a8e0-4c35-a364e2c81f4c}">
           <p14:sldIdLst>
             <p14:sldId id="265"/>
             <p14:sldId id="266"/>
           </p14:sldIdLst>
         </p14:section>
-        <p14:section name="정리" id="{824cc0c1-169f-398d-a4b1-afac66b9f893}">
+        <p14:section name="정리" id="{4fd667b5-64c7-be04-a05d-defc345d77f5}">
           <p14:sldIdLst>
             <p14:sldId id="267"/>
           </p14:sldIdLst>
         </p14:section>
-        <p14:section name="보충" id="{8055b8e6-202b-9650-f0c2-ea6f0ce93ac7}">
+        <p14:section name="보충" id="{651ac752-b5ec-7193-36fa-b156057adb42}">
           <p14:sldIdLst>
             <p14:sldId id="268"/>
           </p14:sldIdLst>

--- a/dist/초2/도덕·윤리/공감과협력/초2_도덕·윤리_공감과협력_01_공감과공정한사용_학생용.pptx
+++ b/dist/초2/도덕·윤리/공감과협력/초2_도덕·윤리_공감과협력_01_공감과공정한사용_학생용.pptx
@@ -119,20 +119,20 @@
   <p:extLst>
     <p:ext uri="{521415D9-36F7-43E2-AB2F-B90AF26B5E84}">
       <p14:sectionLst xmlns:p14="http://schemas.microsoft.com/office/powerpoint/2010/main">
-        <p14:section name="도입" id="{5134c9af-c4d6-efb7-6c4a-5c856643034b}">
+        <p14:section name="도입" id="{94ee548b-efe8-5400-59e2-8a96f441ddd0}">
           <p14:sldIdLst>
             <p14:sldId id="256"/>
             <p14:sldId id="257"/>
           </p14:sldIdLst>
         </p14:section>
-        <p14:section name="개념" id="{a96d43d8-239f-125f-0b55-3beee772d946}">
+        <p14:section name="개념" id="{a7e17c13-c7fe-2f7b-6415-e02f52a54755}">
           <p14:sldIdLst>
             <p14:sldId id="258"/>
             <p14:sldId id="259"/>
             <p14:sldId id="261"/>
           </p14:sldIdLst>
         </p14:section>
-        <p14:section name="연습" id="{49b6b6f8-6958-3dfc-6175-ef529c1bd33b}">
+        <p14:section name="연습" id="{a323d3c0-94dd-242d-09d7-54ad4e387c66}">
           <p14:sldIdLst>
             <p14:sldId id="260"/>
             <p14:sldId id="262"/>
@@ -140,24 +140,24 @@
             <p14:sldId id="264"/>
           </p14:sldIdLst>
         </p14:section>
-        <p14:section name="개념" id="{a4e1fe3b-58bc-3847-3940-f111ae858553}">
+        <p14:section name="개념" id="{922cc01a-50cc-4fa3-d9c0-c0c7b872b275}">
           <p14:sldIdLst/>
         </p14:section>
-        <p14:section name="연습" id="{40a904c1-f29d-bca3-056a-ad8967d586ee}">
+        <p14:section name="연습" id="{007f5a16-5d6b-c0f6-b991-6f9270006a1a}">
           <p14:sldIdLst/>
         </p14:section>
-        <p14:section name="확인" id="{fe0de344-0861-a8e0-4c35-a364e2c81f4c}">
+        <p14:section name="확인" id="{0f849d4e-6d6d-4050-6807-196347020c97}">
           <p14:sldIdLst>
             <p14:sldId id="265"/>
             <p14:sldId id="266"/>
           </p14:sldIdLst>
         </p14:section>
-        <p14:section name="정리" id="{4fd667b5-64c7-be04-a05d-defc345d77f5}">
+        <p14:section name="정리" id="{7b94a94c-8ccf-307c-f692-51849ef1ba9e}">
           <p14:sldIdLst>
             <p14:sldId id="267"/>
           </p14:sldIdLst>
         </p14:section>
-        <p14:section name="보충" id="{651ac752-b5ec-7193-36fa-b156057adb42}">
+        <p14:section name="보충" id="{6ac3eb4d-a11c-2ffc-9e87-622382feb71f}">
           <p14:sldIdLst>
             <p14:sldId id="268"/>
           </p14:sldIdLst>
